--- a/presentation/dept-template-slide.pptx
+++ b/presentation/dept-template-slide.pptx
@@ -6,9 +6,10 @@
   </p:sldMasterIdLst>
   <p:sldIdLst>
     <p:sldId id="256" r:id="rId2"/>
+    <p:sldId id="257" r:id="rId3"/>
   </p:sldIdLst>
   <p:notesMasterIdLst>
-    <p:notesMasterId r:id="rId3"/>
+    <p:notesMasterId r:id="rId4"/>
   </p:notesMasterIdLst>
   <p:sldSz cx="12192000" cy="6858000"/>
   <p:notesSz cx="6858000" cy="12192000"/>
@@ -502,7 +503,7 @@
           <a:p>
             <a:r>
               <a:rPr lang="en-US" dirty="0"/>
-              <a:t>Шаблон слайда отдела. Блок 2.1 «Что было сделано за 3 недели» — перечень завершённых задач за период 25.08–15.09: название задачи + краткий результат (цифра или факт).</a:t>
+              <a:t/>
             </a:r>
             <a:endParaRPr lang="en-US" dirty="0"/>
           </a:p>
@@ -526,6 +527,94 @@
             <a:fld id="{F7021451-1387-4CA6-816F-3879F97B5CBC}" type="slidenum">
               <a:rPr lang="en-US"/>
               <a:t>1</a:t>
+            </a:fld>
+            <a:endParaRPr lang="en-US"/>
+          </a:p>
+        </p:txBody>
+      </p:sp>
+    </p:spTree>
+    <p:extLst>
+      <p:ext uri="{BB962C8B-B14F-4D97-AF65-F5344CB8AC3E}">
+        <p14:creationId xmlns:p14="http://schemas.microsoft.com/office/powerpoint/2010/main" val="1024086991"/>
+      </p:ext>
+    </p:extLst>
+  </p:cSld>
+  <p:clrMapOvr>
+    <a:masterClrMapping/>
+  </p:clrMapOvr>
+</p:notes>
+</file>
+
+<file path=ppt/notesSlides/notesSlide2.xml><?xml version="1.0" encoding="utf-8"?>
+<p:notes xmlns:a="http://schemas.openxmlformats.org/drawingml/2006/main" xmlns:r="http://schemas.openxmlformats.org/officeDocument/2006/relationships" xmlns:p="http://schemas.openxmlformats.org/presentationml/2006/main">
+  <p:cSld>
+    <p:spTree>
+      <p:nvGrpSpPr>
+        <p:cNvPr id="1" name=""/>
+        <p:cNvGrpSpPr/>
+        <p:nvPr/>
+      </p:nvGrpSpPr>
+      <p:grpSpPr>
+        <a:xfrm>
+          <a:off x="0" y="0"/>
+          <a:ext cx="0" cy="0"/>
+          <a:chOff x="0" y="0"/>
+          <a:chExt cx="0" cy="0"/>
+        </a:xfrm>
+      </p:grpSpPr>
+      <p:sp>
+        <p:nvSpPr>
+          <p:cNvPr id="2" name="Slide Image Placeholder 1"/>
+          <p:cNvSpPr>
+            <a:spLocks noGrp="1" noRot="1" noChangeAspect="1"/>
+          </p:cNvSpPr>
+          <p:nvPr>
+            <p:ph type="sldImg"/>
+          </p:nvPr>
+        </p:nvSpPr>
+        <p:spPr/>
+      </p:sp>
+      <p:sp>
+        <p:nvSpPr>
+          <p:cNvPr id="3" name="Notes Placeholder 2"/>
+          <p:cNvSpPr>
+            <a:spLocks noGrp="1"/>
+          </p:cNvSpPr>
+          <p:nvPr>
+            <p:ph type="body" idx="1"/>
+          </p:nvPr>
+        </p:nvSpPr>
+        <p:spPr/>
+        <p:txBody>
+          <a:bodyPr/>
+          <a:lstStyle/>
+          <a:p>
+            <a:r>
+              <a:rPr lang="en-US" dirty="0"/>
+              <a:t>Шаблон слайда отдела. Блок 2.1 «Что было сделано за 3 недели» — перечень завершённых задач за период 25.08–15.09: название задачи + краткий результат (цифра или факт).</a:t>
+            </a:r>
+            <a:endParaRPr lang="en-US" dirty="0"/>
+          </a:p>
+        </p:txBody>
+      </p:sp>
+      <p:sp>
+        <p:nvSpPr>
+          <p:cNvPr id="4" name="Slide Number Placeholder 3"/>
+          <p:cNvSpPr>
+            <a:spLocks noGrp="1"/>
+          </p:cNvSpPr>
+          <p:nvPr>
+            <p:ph type="sldNum" sz="quarter" idx="10"/>
+          </p:nvPr>
+        </p:nvSpPr>
+        <p:spPr/>
+        <p:txBody>
+          <a:bodyPr/>
+          <a:lstStyle/>
+          <a:p>
+            <a:fld id="{F7021451-1387-4CA6-816F-3879F97B5CBC}" type="slidenum">
+              <a:rPr lang="en-US"/>
+              <a:t>2</a:t>
             </a:fld>
             <a:endParaRPr lang="en-US"/>
           </a:p>
@@ -883,6 +972,155 @@
         </p:nvSpPr>
         <p:spPr>
           <a:xfrm>
+            <a:off x="384048" y="2331720"/>
+            <a:ext cx="8686800" cy="731520"/>
+          </a:xfrm>
+          <a:prstGeom prst="rect">
+            <a:avLst/>
+          </a:prstGeom>
+          <a:noFill/>
+          <a:ln/>
+        </p:spPr>
+        <p:txBody>
+          <a:bodyPr wrap="square" lIns="0" tIns="0" rIns="0" bIns="0" rtlCol="0" anchor="ctr"/>
+          <a:lstStyle/>
+          <a:p>
+            <a:pPr indent="0" marL="0">
+              <a:buNone/>
+            </a:pPr>
+            <a:r>
+              <a:rPr lang="en-US" sz="4000" b="1" dirty="0">
+                <a:solidFill>
+                  <a:srgbClr val="1B2A33"/>
+                </a:solidFill>
+                <a:latin typeface="Arial" pitchFamily="34" charset="0"/>
+                <a:ea typeface="Arial" pitchFamily="34" charset="-122"/>
+                <a:cs typeface="Arial" pitchFamily="34" charset="-120"/>
+              </a:rPr>
+              <a:t>Промежуточные результаты</a:t>
+            </a:r>
+            <a:endParaRPr lang="en-US" sz="4000" dirty="0"/>
+          </a:p>
+        </p:txBody>
+      </p:sp>
+      <p:sp>
+        <p:nvSpPr>
+          <p:cNvPr id="3" name="Text 1"/>
+          <p:cNvSpPr txBox="1"/>
+          <p:nvPr/>
+        </p:nvSpPr>
+        <p:spPr>
+          <a:xfrm>
+            <a:off x="384048" y="3127248"/>
+            <a:ext cx="8686800" cy="411480"/>
+          </a:xfrm>
+          <a:prstGeom prst="rect">
+            <a:avLst/>
+          </a:prstGeom>
+          <a:noFill/>
+          <a:ln/>
+        </p:spPr>
+        <p:txBody>
+          <a:bodyPr wrap="square" lIns="0" tIns="0" rIns="0" bIns="0" rtlCol="0" anchor="ctr"/>
+          <a:lstStyle/>
+          <a:p>
+            <a:pPr indent="0" marL="0">
+              <a:buNone/>
+            </a:pPr>
+            <a:r>
+              <a:rPr lang="en-US" sz="1800" dirty="0">
+                <a:solidFill>
+                  <a:srgbClr val="3B6FE0"/>
+                </a:solidFill>
+                <a:latin typeface="Arial" pitchFamily="34" charset="0"/>
+                <a:ea typeface="Arial" pitchFamily="34" charset="-122"/>
+                <a:cs typeface="Arial" pitchFamily="34" charset="-120"/>
+              </a:rPr>
+              <a:t>Q3 2026  ·  38 неделя</a:t>
+            </a:r>
+            <a:endParaRPr lang="en-US" sz="1800" dirty="0"/>
+          </a:p>
+        </p:txBody>
+      </p:sp>
+      <p:sp>
+        <p:nvSpPr>
+          <p:cNvPr id="4" name="Text 2"/>
+          <p:cNvSpPr txBox="1"/>
+          <p:nvPr/>
+        </p:nvSpPr>
+        <p:spPr>
+          <a:xfrm>
+            <a:off x="384048" y="3703320"/>
+            <a:ext cx="8686800" cy="320040"/>
+          </a:xfrm>
+          <a:prstGeom prst="rect">
+            <a:avLst/>
+          </a:prstGeom>
+          <a:noFill/>
+          <a:ln/>
+        </p:spPr>
+        <p:txBody>
+          <a:bodyPr wrap="square" lIns="0" tIns="0" rIns="0" bIns="0" rtlCol="0" anchor="ctr"/>
+          <a:lstStyle/>
+          <a:p>
+            <a:pPr indent="0" marL="0">
+              <a:buNone/>
+            </a:pPr>
+            <a:r>
+              <a:rPr lang="en-US" sz="1100" dirty="0">
+                <a:solidFill>
+                  <a:srgbClr val="9AA6A5"/>
+                </a:solidFill>
+                <a:latin typeface="Arial" pitchFamily="34" charset="0"/>
+                <a:ea typeface="Arial" pitchFamily="34" charset="-122"/>
+                <a:cs typeface="Arial" pitchFamily="34" charset="-120"/>
+              </a:rPr>
+              <a:t>Шаблон слайда отдела: 1 → 2 → 2.1 → 3 → 4 → 5</a:t>
+            </a:r>
+            <a:endParaRPr lang="en-US" sz="1100" dirty="0"/>
+          </a:p>
+        </p:txBody>
+      </p:sp>
+    </p:spTree>
+  </p:cSld>
+  <p:clrMapOvr>
+    <a:masterClrMapping/>
+  </p:clrMapOvr>
+</p:sld>
+</file>
+
+<file path=ppt/slides/slide2.xml><?xml version="1.0" encoding="utf-8"?>
+<p:sld xmlns:a="http://schemas.openxmlformats.org/drawingml/2006/main" xmlns:r="http://schemas.openxmlformats.org/officeDocument/2006/relationships" xmlns:p="http://schemas.openxmlformats.org/presentationml/2006/main">
+  <p:cSld name="Slide 2">
+    <p:bg>
+      <p:bgPr>
+        <a:solidFill>
+          <a:srgbClr val="FFFFFF"/>
+        </a:solidFill>
+      </p:bgPr>
+    </p:bg>
+    <p:spTree>
+      <p:nvGrpSpPr>
+        <p:cNvPr id="1" name=""/>
+        <p:cNvGrpSpPr/>
+        <p:nvPr/>
+      </p:nvGrpSpPr>
+      <p:grpSpPr>
+        <a:xfrm>
+          <a:off x="0" y="0"/>
+          <a:ext cx="0" cy="0"/>
+          <a:chOff x="0" y="0"/>
+          <a:chExt cx="0" cy="0"/>
+        </a:xfrm>
+      </p:grpSpPr>
+      <p:sp>
+        <p:nvSpPr>
+          <p:cNvPr id="2" name="Text 0"/>
+          <p:cNvSpPr txBox="1"/>
+          <p:nvPr/>
+        </p:nvSpPr>
+        <p:spPr>
+          <a:xfrm>
             <a:off x="384048" y="310896"/>
             <a:ext cx="5486400" cy="420624"/>
           </a:xfrm>

--- a/presentation/dept-template-slide.pptx
+++ b/presentation/dept-template-slide.pptx
@@ -591,7 +591,7 @@
           <a:p>
             <a:r>
               <a:rPr lang="en-US" dirty="0"/>
-              <a:t>Шаблон слайда отдела. Блок 2.1 «Что было сделано за 3 недели» — перечень завершённых задач за период 25.08–15.09: название задачи + краткий результат (цифра или факт).</a:t>
+              <a:t>Шаблон слайда отдела, сквозная нумерация 1–6. Блок 3 «Что сделал и что помогло» — завершённые задачи за 25.08–15.09 и драйвер по каждой (что позволило сделать). Блок 4 «Что не сделал и узкое горлышко» — незакрытые задачи и ключевая сложность по каждой.</a:t>
             </a:r>
             <a:endParaRPr lang="en-US" dirty="0"/>
           </a:p>
@@ -1075,7 +1075,7 @@
                 <a:ea typeface="Arial" pitchFamily="34" charset="-122"/>
                 <a:cs typeface="Arial" pitchFamily="34" charset="-120"/>
               </a:rPr>
-              <a:t>Шаблон слайда отдела: 1 → 2 → 2.1 → 3 → 4 → 5</a:t>
+              <a:t>Шаблон слайда отдела: 1 → 2 → 3 → 4 → 5 → 6</a:t>
             </a:r>
             <a:endParaRPr lang="en-US" sz="1100" dirty="0"/>
           </a:p>
@@ -1303,7 +1303,7 @@
         <p:spPr>
           <a:xfrm>
             <a:off x="768096" y="1088136"/>
-            <a:ext cx="1216152" cy="566928"/>
+            <a:ext cx="1170432" cy="566928"/>
           </a:xfrm>
           <a:prstGeom prst="rect">
             <a:avLst/>
@@ -1345,11 +1345,11 @@
         <p:spPr>
           <a:xfrm>
             <a:off x="384048" y="1755648"/>
-            <a:ext cx="1600200" cy="4041648"/>
+            <a:ext cx="1554480" cy="4041648"/>
           </a:xfrm>
           <a:prstGeom prst="roundRect">
             <a:avLst>
-              <a:gd name="adj" fmla="val 3429"/>
+              <a:gd name="adj" fmla="val 3529"/>
             </a:avLst>
           </a:prstGeom>
           <a:solidFill>
@@ -1372,7 +1372,7 @@
         <p:spPr>
           <a:xfrm>
             <a:off x="512064" y="1883664"/>
-            <a:ext cx="1344168" cy="182880"/>
+            <a:ext cx="1298448" cy="182880"/>
           </a:xfrm>
           <a:prstGeom prst="rect">
             <a:avLst/>
@@ -1411,7 +1411,7 @@
         <p:spPr>
           <a:xfrm>
             <a:off x="512064" y="2066544"/>
-            <a:ext cx="1344168" cy="274320"/>
+            <a:ext cx="1298448" cy="274320"/>
           </a:xfrm>
           <a:prstGeom prst="rect">
             <a:avLst/>
@@ -1450,7 +1450,7 @@
         <p:spPr>
           <a:xfrm>
             <a:off x="512064" y="2798064"/>
-            <a:ext cx="1344168" cy="182880"/>
+            <a:ext cx="1298448" cy="182880"/>
           </a:xfrm>
           <a:prstGeom prst="rect">
             <a:avLst/>
@@ -1489,7 +1489,7 @@
         <p:spPr>
           <a:xfrm>
             <a:off x="512064" y="2980944"/>
-            <a:ext cx="1344168" cy="274320"/>
+            <a:ext cx="1298448" cy="274320"/>
           </a:xfrm>
           <a:prstGeom prst="rect">
             <a:avLst/>
@@ -1528,7 +1528,7 @@
         <p:spPr>
           <a:xfrm>
             <a:off x="512064" y="3712464"/>
-            <a:ext cx="1344168" cy="182880"/>
+            <a:ext cx="1298448" cy="182880"/>
           </a:xfrm>
           <a:prstGeom prst="rect">
             <a:avLst/>
@@ -1567,7 +1567,7 @@
         <p:spPr>
           <a:xfrm>
             <a:off x="512064" y="3895344"/>
-            <a:ext cx="1344168" cy="274320"/>
+            <a:ext cx="1298448" cy="274320"/>
           </a:xfrm>
           <a:prstGeom prst="rect">
             <a:avLst/>
@@ -1606,7 +1606,7 @@
         <p:spPr>
           <a:xfrm>
             <a:off x="512064" y="4626864"/>
-            <a:ext cx="1344168" cy="182880"/>
+            <a:ext cx="1298448" cy="182880"/>
           </a:xfrm>
           <a:prstGeom prst="rect">
             <a:avLst/>
@@ -1645,7 +1645,7 @@
         <p:spPr>
           <a:xfrm>
             <a:off x="512064" y="4809744"/>
-            <a:ext cx="1344168" cy="274320"/>
+            <a:ext cx="1298448" cy="274320"/>
           </a:xfrm>
           <a:prstGeom prst="rect">
             <a:avLst/>
@@ -1683,7 +1683,7 @@
         </p:nvSpPr>
         <p:spPr>
           <a:xfrm>
-            <a:off x="2093976" y="1115568"/>
+            <a:off x="2048256" y="1115568"/>
             <a:ext cx="292608" cy="292608"/>
           </a:xfrm>
           <a:prstGeom prst="ellipse">
@@ -1708,7 +1708,7 @@
         </p:nvSpPr>
         <p:spPr>
           <a:xfrm>
-            <a:off x="2039112" y="1115568"/>
+            <a:off x="1993392" y="1115568"/>
             <a:ext cx="402336" cy="292608"/>
           </a:xfrm>
           <a:prstGeom prst="rect">
@@ -1747,8 +1747,8 @@
         </p:nvSpPr>
         <p:spPr>
           <a:xfrm>
-            <a:off x="2478024" y="1088136"/>
-            <a:ext cx="1581912" cy="566928"/>
+            <a:off x="2432304" y="1088136"/>
+            <a:ext cx="1490472" cy="566928"/>
           </a:xfrm>
           <a:prstGeom prst="rect">
             <a:avLst/>
@@ -1789,12 +1789,12 @@
         </p:nvSpPr>
         <p:spPr>
           <a:xfrm>
-            <a:off x="2093976" y="1755648"/>
-            <a:ext cx="1965960" cy="4041648"/>
+            <a:off x="2048256" y="1755648"/>
+            <a:ext cx="1874520" cy="4041648"/>
           </a:xfrm>
           <a:prstGeom prst="roundRect">
             <a:avLst>
-              <a:gd name="adj" fmla="val 2791"/>
+              <a:gd name="adj" fmla="val 2927"/>
             </a:avLst>
           </a:prstGeom>
           <a:solidFill>
@@ -1816,8 +1816,8 @@
         </p:nvSpPr>
         <p:spPr>
           <a:xfrm>
-            <a:off x="2221992" y="1883664"/>
-            <a:ext cx="1709928" cy="182880"/>
+            <a:off x="2176272" y="1883664"/>
+            <a:ext cx="1618488" cy="182880"/>
           </a:xfrm>
           <a:prstGeom prst="rect">
             <a:avLst/>
@@ -1855,8 +1855,8 @@
         </p:nvSpPr>
         <p:spPr>
           <a:xfrm>
-            <a:off x="2221992" y="2066544"/>
-            <a:ext cx="940460" cy="274320"/>
+            <a:off x="2176272" y="2066544"/>
+            <a:ext cx="890168" cy="274320"/>
           </a:xfrm>
           <a:prstGeom prst="rect">
             <a:avLst/>
@@ -1894,8 +1894,8 @@
         </p:nvSpPr>
         <p:spPr>
           <a:xfrm>
-            <a:off x="3162452" y="2084832"/>
-            <a:ext cx="769468" cy="237744"/>
+            <a:off x="3066440" y="2084832"/>
+            <a:ext cx="728320" cy="237744"/>
           </a:xfrm>
           <a:prstGeom prst="rect">
             <a:avLst/>
@@ -1933,8 +1933,8 @@
         </p:nvSpPr>
         <p:spPr>
           <a:xfrm>
-            <a:off x="2221992" y="2798064"/>
-            <a:ext cx="1709928" cy="182880"/>
+            <a:off x="2176272" y="2798064"/>
+            <a:ext cx="1618488" cy="182880"/>
           </a:xfrm>
           <a:prstGeom prst="rect">
             <a:avLst/>
@@ -1972,8 +1972,8 @@
         </p:nvSpPr>
         <p:spPr>
           <a:xfrm>
-            <a:off x="2221992" y="2980944"/>
-            <a:ext cx="940460" cy="274320"/>
+            <a:off x="2176272" y="2980944"/>
+            <a:ext cx="890168" cy="274320"/>
           </a:xfrm>
           <a:prstGeom prst="rect">
             <a:avLst/>
@@ -2011,8 +2011,8 @@
         </p:nvSpPr>
         <p:spPr>
           <a:xfrm>
-            <a:off x="3162452" y="2999232"/>
-            <a:ext cx="769468" cy="237744"/>
+            <a:off x="3066440" y="2999232"/>
+            <a:ext cx="728320" cy="237744"/>
           </a:xfrm>
           <a:prstGeom prst="rect">
             <a:avLst/>
@@ -2050,8 +2050,8 @@
         </p:nvSpPr>
         <p:spPr>
           <a:xfrm>
-            <a:off x="2221992" y="3712464"/>
-            <a:ext cx="1709928" cy="182880"/>
+            <a:off x="2176272" y="3712464"/>
+            <a:ext cx="1618488" cy="182880"/>
           </a:xfrm>
           <a:prstGeom prst="rect">
             <a:avLst/>
@@ -2089,8 +2089,8 @@
         </p:nvSpPr>
         <p:spPr>
           <a:xfrm>
-            <a:off x="2221992" y="3895344"/>
-            <a:ext cx="940460" cy="274320"/>
+            <a:off x="2176272" y="3895344"/>
+            <a:ext cx="890168" cy="274320"/>
           </a:xfrm>
           <a:prstGeom prst="rect">
             <a:avLst/>
@@ -2128,8 +2128,8 @@
         </p:nvSpPr>
         <p:spPr>
           <a:xfrm>
-            <a:off x="3162452" y="3913632"/>
-            <a:ext cx="769468" cy="237744"/>
+            <a:off x="3066440" y="3913632"/>
+            <a:ext cx="728320" cy="237744"/>
           </a:xfrm>
           <a:prstGeom prst="rect">
             <a:avLst/>
@@ -2167,8 +2167,8 @@
         </p:nvSpPr>
         <p:spPr>
           <a:xfrm>
-            <a:off x="2221992" y="4626864"/>
-            <a:ext cx="1709928" cy="182880"/>
+            <a:off x="2176272" y="4626864"/>
+            <a:ext cx="1618488" cy="182880"/>
           </a:xfrm>
           <a:prstGeom prst="rect">
             <a:avLst/>
@@ -2206,8 +2206,8 @@
         </p:nvSpPr>
         <p:spPr>
           <a:xfrm>
-            <a:off x="2221992" y="4809744"/>
-            <a:ext cx="940460" cy="274320"/>
+            <a:off x="2176272" y="4809744"/>
+            <a:ext cx="890168" cy="274320"/>
           </a:xfrm>
           <a:prstGeom prst="rect">
             <a:avLst/>
@@ -2245,8 +2245,8 @@
         </p:nvSpPr>
         <p:spPr>
           <a:xfrm>
-            <a:off x="3162452" y="4828032"/>
-            <a:ext cx="769468" cy="237744"/>
+            <a:off x="3066440" y="4828032"/>
+            <a:ext cx="728320" cy="237744"/>
           </a:xfrm>
           <a:prstGeom prst="rect">
             <a:avLst/>
@@ -2284,7 +2284,7 @@
         </p:nvSpPr>
         <p:spPr>
           <a:xfrm>
-            <a:off x="4169664" y="1115568"/>
+            <a:off x="4032504" y="1115568"/>
             <a:ext cx="292608" cy="292608"/>
           </a:xfrm>
           <a:prstGeom prst="ellipse">
@@ -2309,7 +2309,7 @@
         </p:nvSpPr>
         <p:spPr>
           <a:xfrm>
-            <a:off x="4114800" y="1115568"/>
+            <a:off x="3977640" y="1115568"/>
             <a:ext cx="402336" cy="292608"/>
           </a:xfrm>
           <a:prstGeom prst="rect">
@@ -2326,7 +2326,7 @@
               <a:buNone/>
             </a:pPr>
             <a:r>
-              <a:rPr lang="en-US" sz="800" b="1" dirty="0">
+              <a:rPr lang="en-US" sz="1100" b="1" dirty="0">
                 <a:solidFill>
                   <a:srgbClr val="FFFFFF"/>
                 </a:solidFill>
@@ -2334,9 +2334,9 @@
                 <a:ea typeface="Arial" pitchFamily="34" charset="-122"/>
                 <a:cs typeface="Arial" pitchFamily="34" charset="-120"/>
               </a:rPr>
-              <a:t>2.1</a:t>
-            </a:r>
-            <a:endParaRPr lang="en-US" sz="800" dirty="0"/>
+              <a:t>3</a:t>
+            </a:r>
+            <a:endParaRPr lang="en-US" sz="1100" dirty="0"/>
           </a:p>
         </p:txBody>
       </p:sp>
@@ -2348,7 +2348,7 @@
         </p:nvSpPr>
         <p:spPr>
           <a:xfrm>
-            <a:off x="4553712" y="1088136"/>
+            <a:off x="4416552" y="1088136"/>
             <a:ext cx="1764792" cy="566928"/>
           </a:xfrm>
           <a:prstGeom prst="rect">
@@ -2376,7 +2376,7 @@
                 <a:ea typeface="Arial" pitchFamily="34" charset="-122"/>
                 <a:cs typeface="Arial" pitchFamily="34" charset="-120"/>
               </a:rPr>
-              <a:t>Что было сделано</a:t>
+              <a:t>Что сделал</a:t>
             </a:r>
             <a:endParaRPr lang="en-US" sz="1150" dirty="0"/>
           </a:p>
@@ -2396,7 +2396,7 @@
                 <a:ea typeface="Arial" pitchFamily="34" charset="-122"/>
                 <a:cs typeface="Arial" pitchFamily="34" charset="-120"/>
               </a:rPr>
-              <a:t>за 3 недели</a:t>
+              <a:t>и что помогло (драйвер)</a:t>
             </a:r>
             <a:endParaRPr lang="en-US" sz="1150" dirty="0"/>
           </a:p>
@@ -2410,7 +2410,7 @@
         </p:nvSpPr>
         <p:spPr>
           <a:xfrm>
-            <a:off x="4169664" y="1755648"/>
+            <a:off x="4032504" y="1755648"/>
             <a:ext cx="2148840" cy="4041648"/>
           </a:xfrm>
           <a:prstGeom prst="roundRect">
@@ -2437,7 +2437,7 @@
         </p:nvSpPr>
         <p:spPr>
           <a:xfrm>
-            <a:off x="4297680" y="1883664"/>
+            <a:off x="4160520" y="1883664"/>
             <a:ext cx="1892808" cy="201168"/>
           </a:xfrm>
           <a:prstGeom prst="rect">
@@ -2476,8 +2476,369 @@
         </p:nvSpPr>
         <p:spPr>
           <a:xfrm>
-            <a:off x="4297680" y="2157984"/>
-            <a:ext cx="1892808" cy="201168"/>
+            <a:off x="4160520" y="2157984"/>
+            <a:ext cx="1892808" cy="384048"/>
+          </a:xfrm>
+          <a:prstGeom prst="rect">
+            <a:avLst/>
+          </a:prstGeom>
+          <a:noFill/>
+          <a:ln/>
+        </p:spPr>
+        <p:txBody>
+          <a:bodyPr wrap="square" lIns="0" tIns="0" rIns="0" bIns="0" rtlCol="0" anchor="t"/>
+          <a:lstStyle/>
+          <a:p>
+            <a:pPr indent="0" marL="0">
+              <a:lnSpc>
+                <a:spcPct val="105000"/>
+              </a:lnSpc>
+              <a:buNone/>
+            </a:pPr>
+            <a:r>
+              <a:rPr lang="en-US" sz="1050" b="1" dirty="0">
+                <a:solidFill>
+                  <a:srgbClr val="1B2A33"/>
+                </a:solidFill>
+                <a:latin typeface="Arial" pitchFamily="34" charset="0"/>
+                <a:ea typeface="Arial" pitchFamily="34" charset="-122"/>
+                <a:cs typeface="Arial" pitchFamily="34" charset="-120"/>
+              </a:rPr>
+              <a:t>Задача — результат</a:t>
+            </a:r>
+            <a:endParaRPr lang="en-US" sz="1050" dirty="0"/>
+          </a:p>
+        </p:txBody>
+      </p:sp>
+      <p:sp>
+        <p:nvSpPr>
+          <p:cNvPr id="39" name="Text 37"/>
+          <p:cNvSpPr txBox="1"/>
+          <p:nvPr/>
+        </p:nvSpPr>
+        <p:spPr>
+          <a:xfrm>
+            <a:off x="4160520" y="2560320"/>
+            <a:ext cx="1892808" cy="384048"/>
+          </a:xfrm>
+          <a:prstGeom prst="rect">
+            <a:avLst/>
+          </a:prstGeom>
+          <a:noFill/>
+          <a:ln/>
+        </p:spPr>
+        <p:txBody>
+          <a:bodyPr wrap="square" lIns="0" tIns="0" rIns="0" bIns="0" rtlCol="0" anchor="t"/>
+          <a:lstStyle/>
+          <a:p>
+            <a:pPr indent="0" marL="0">
+              <a:lnSpc>
+                <a:spcPct val="105000"/>
+              </a:lnSpc>
+              <a:buNone/>
+            </a:pPr>
+            <a:r>
+              <a:rPr lang="en-US" sz="900" dirty="0">
+                <a:solidFill>
+                  <a:srgbClr val="9AA6A5"/>
+                </a:solidFill>
+                <a:latin typeface="Arial" pitchFamily="34" charset="0"/>
+                <a:ea typeface="Arial" pitchFamily="34" charset="-122"/>
+                <a:cs typeface="Arial" pitchFamily="34" charset="-120"/>
+              </a:rPr>
+              <a:t>драйвер: что помогло</a:t>
+            </a:r>
+            <a:endParaRPr lang="en-US" sz="900" dirty="0"/>
+          </a:p>
+        </p:txBody>
+      </p:sp>
+      <p:sp>
+        <p:nvSpPr>
+          <p:cNvPr id="40" name="Text 38"/>
+          <p:cNvSpPr txBox="1"/>
+          <p:nvPr/>
+        </p:nvSpPr>
+        <p:spPr>
+          <a:xfrm>
+            <a:off x="4160520" y="3035808"/>
+            <a:ext cx="1892808" cy="384048"/>
+          </a:xfrm>
+          <a:prstGeom prst="rect">
+            <a:avLst/>
+          </a:prstGeom>
+          <a:noFill/>
+          <a:ln/>
+        </p:spPr>
+        <p:txBody>
+          <a:bodyPr wrap="square" lIns="0" tIns="0" rIns="0" bIns="0" rtlCol="0" anchor="t"/>
+          <a:lstStyle/>
+          <a:p>
+            <a:pPr indent="0" marL="0">
+              <a:lnSpc>
+                <a:spcPct val="105000"/>
+              </a:lnSpc>
+              <a:buNone/>
+            </a:pPr>
+            <a:r>
+              <a:rPr lang="en-US" sz="1050" b="1" dirty="0">
+                <a:solidFill>
+                  <a:srgbClr val="1B2A33"/>
+                </a:solidFill>
+                <a:latin typeface="Arial" pitchFamily="34" charset="0"/>
+                <a:ea typeface="Arial" pitchFamily="34" charset="-122"/>
+                <a:cs typeface="Arial" pitchFamily="34" charset="-120"/>
+              </a:rPr>
+              <a:t>Задача — результат</a:t>
+            </a:r>
+            <a:endParaRPr lang="en-US" sz="1050" dirty="0"/>
+          </a:p>
+        </p:txBody>
+      </p:sp>
+      <p:sp>
+        <p:nvSpPr>
+          <p:cNvPr id="41" name="Text 39"/>
+          <p:cNvSpPr txBox="1"/>
+          <p:nvPr/>
+        </p:nvSpPr>
+        <p:spPr>
+          <a:xfrm>
+            <a:off x="4160520" y="3438144"/>
+            <a:ext cx="1892808" cy="384048"/>
+          </a:xfrm>
+          <a:prstGeom prst="rect">
+            <a:avLst/>
+          </a:prstGeom>
+          <a:noFill/>
+          <a:ln/>
+        </p:spPr>
+        <p:txBody>
+          <a:bodyPr wrap="square" lIns="0" tIns="0" rIns="0" bIns="0" rtlCol="0" anchor="t"/>
+          <a:lstStyle/>
+          <a:p>
+            <a:pPr indent="0" marL="0">
+              <a:lnSpc>
+                <a:spcPct val="105000"/>
+              </a:lnSpc>
+              <a:buNone/>
+            </a:pPr>
+            <a:r>
+              <a:rPr lang="en-US" sz="900" dirty="0">
+                <a:solidFill>
+                  <a:srgbClr val="9AA6A5"/>
+                </a:solidFill>
+                <a:latin typeface="Arial" pitchFamily="34" charset="0"/>
+                <a:ea typeface="Arial" pitchFamily="34" charset="-122"/>
+                <a:cs typeface="Arial" pitchFamily="34" charset="-120"/>
+              </a:rPr>
+              <a:t>драйвер: что помогло</a:t>
+            </a:r>
+            <a:endParaRPr lang="en-US" sz="900" dirty="0"/>
+          </a:p>
+        </p:txBody>
+      </p:sp>
+      <p:sp>
+        <p:nvSpPr>
+          <p:cNvPr id="42" name="Text 40"/>
+          <p:cNvSpPr txBox="1"/>
+          <p:nvPr/>
+        </p:nvSpPr>
+        <p:spPr>
+          <a:xfrm>
+            <a:off x="4160520" y="3913632"/>
+            <a:ext cx="1892808" cy="384048"/>
+          </a:xfrm>
+          <a:prstGeom prst="rect">
+            <a:avLst/>
+          </a:prstGeom>
+          <a:noFill/>
+          <a:ln/>
+        </p:spPr>
+        <p:txBody>
+          <a:bodyPr wrap="square" lIns="0" tIns="0" rIns="0" bIns="0" rtlCol="0" anchor="t"/>
+          <a:lstStyle/>
+          <a:p>
+            <a:pPr indent="0" marL="0">
+              <a:lnSpc>
+                <a:spcPct val="105000"/>
+              </a:lnSpc>
+              <a:buNone/>
+            </a:pPr>
+            <a:r>
+              <a:rPr lang="en-US" sz="1050" b="1" dirty="0">
+                <a:solidFill>
+                  <a:srgbClr val="1B2A33"/>
+                </a:solidFill>
+                <a:latin typeface="Arial" pitchFamily="34" charset="0"/>
+                <a:ea typeface="Arial" pitchFamily="34" charset="-122"/>
+                <a:cs typeface="Arial" pitchFamily="34" charset="-120"/>
+              </a:rPr>
+              <a:t>Задача — результат</a:t>
+            </a:r>
+            <a:endParaRPr lang="en-US" sz="1050" dirty="0"/>
+          </a:p>
+        </p:txBody>
+      </p:sp>
+      <p:sp>
+        <p:nvSpPr>
+          <p:cNvPr id="43" name="Text 41"/>
+          <p:cNvSpPr txBox="1"/>
+          <p:nvPr/>
+        </p:nvSpPr>
+        <p:spPr>
+          <a:xfrm>
+            <a:off x="4160520" y="4315968"/>
+            <a:ext cx="1892808" cy="384048"/>
+          </a:xfrm>
+          <a:prstGeom prst="rect">
+            <a:avLst/>
+          </a:prstGeom>
+          <a:noFill/>
+          <a:ln/>
+        </p:spPr>
+        <p:txBody>
+          <a:bodyPr wrap="square" lIns="0" tIns="0" rIns="0" bIns="0" rtlCol="0" anchor="t"/>
+          <a:lstStyle/>
+          <a:p>
+            <a:pPr indent="0" marL="0">
+              <a:lnSpc>
+                <a:spcPct val="105000"/>
+              </a:lnSpc>
+              <a:buNone/>
+            </a:pPr>
+            <a:r>
+              <a:rPr lang="en-US" sz="900" dirty="0">
+                <a:solidFill>
+                  <a:srgbClr val="9AA6A5"/>
+                </a:solidFill>
+                <a:latin typeface="Arial" pitchFamily="34" charset="0"/>
+                <a:ea typeface="Arial" pitchFamily="34" charset="-122"/>
+                <a:cs typeface="Arial" pitchFamily="34" charset="-120"/>
+              </a:rPr>
+              <a:t>драйвер: что помогло</a:t>
+            </a:r>
+            <a:endParaRPr lang="en-US" sz="900" dirty="0"/>
+          </a:p>
+        </p:txBody>
+      </p:sp>
+      <p:sp>
+        <p:nvSpPr>
+          <p:cNvPr id="44" name="Text 42"/>
+          <p:cNvSpPr txBox="1"/>
+          <p:nvPr/>
+        </p:nvSpPr>
+        <p:spPr>
+          <a:xfrm>
+            <a:off x="4160520" y="4791456"/>
+            <a:ext cx="1892808" cy="384048"/>
+          </a:xfrm>
+          <a:prstGeom prst="rect">
+            <a:avLst/>
+          </a:prstGeom>
+          <a:noFill/>
+          <a:ln/>
+        </p:spPr>
+        <p:txBody>
+          <a:bodyPr wrap="square" lIns="0" tIns="0" rIns="0" bIns="0" rtlCol="0" anchor="t"/>
+          <a:lstStyle/>
+          <a:p>
+            <a:pPr indent="0" marL="0">
+              <a:lnSpc>
+                <a:spcPct val="105000"/>
+              </a:lnSpc>
+              <a:buNone/>
+            </a:pPr>
+            <a:r>
+              <a:rPr lang="en-US" sz="1050" b="1" dirty="0">
+                <a:solidFill>
+                  <a:srgbClr val="1B2A33"/>
+                </a:solidFill>
+                <a:latin typeface="Arial" pitchFamily="34" charset="0"/>
+                <a:ea typeface="Arial" pitchFamily="34" charset="-122"/>
+                <a:cs typeface="Arial" pitchFamily="34" charset="-120"/>
+              </a:rPr>
+              <a:t>Задача — результат</a:t>
+            </a:r>
+            <a:endParaRPr lang="en-US" sz="1050" dirty="0"/>
+          </a:p>
+        </p:txBody>
+      </p:sp>
+      <p:sp>
+        <p:nvSpPr>
+          <p:cNvPr id="45" name="Text 43"/>
+          <p:cNvSpPr txBox="1"/>
+          <p:nvPr/>
+        </p:nvSpPr>
+        <p:spPr>
+          <a:xfrm>
+            <a:off x="4160520" y="5193792"/>
+            <a:ext cx="1892808" cy="384048"/>
+          </a:xfrm>
+          <a:prstGeom prst="rect">
+            <a:avLst/>
+          </a:prstGeom>
+          <a:noFill/>
+          <a:ln/>
+        </p:spPr>
+        <p:txBody>
+          <a:bodyPr wrap="square" lIns="0" tIns="0" rIns="0" bIns="0" rtlCol="0" anchor="t"/>
+          <a:lstStyle/>
+          <a:p>
+            <a:pPr indent="0" marL="0">
+              <a:lnSpc>
+                <a:spcPct val="105000"/>
+              </a:lnSpc>
+              <a:buNone/>
+            </a:pPr>
+            <a:r>
+              <a:rPr lang="en-US" sz="900" dirty="0">
+                <a:solidFill>
+                  <a:srgbClr val="9AA6A5"/>
+                </a:solidFill>
+                <a:latin typeface="Arial" pitchFamily="34" charset="0"/>
+                <a:ea typeface="Arial" pitchFamily="34" charset="-122"/>
+                <a:cs typeface="Arial" pitchFamily="34" charset="-120"/>
+              </a:rPr>
+              <a:t>драйвер: что помогло</a:t>
+            </a:r>
+            <a:endParaRPr lang="en-US" sz="900" dirty="0"/>
+          </a:p>
+        </p:txBody>
+      </p:sp>
+      <p:sp>
+        <p:nvSpPr>
+          <p:cNvPr id="46" name="Shape 44"/>
+          <p:cNvSpPr/>
+          <p:nvPr/>
+        </p:nvSpPr>
+        <p:spPr>
+          <a:xfrm>
+            <a:off x="6291072" y="1115568"/>
+            <a:ext cx="292608" cy="292608"/>
+          </a:xfrm>
+          <a:prstGeom prst="ellipse">
+            <a:avLst/>
+          </a:prstGeom>
+          <a:solidFill>
+            <a:srgbClr val="3B6FE0"/>
+          </a:solidFill>
+          <a:ln w="12700">
+            <a:solidFill>
+              <a:srgbClr val="3B6FE0"/>
+            </a:solidFill>
+            <a:prstDash val="solid"/>
+          </a:ln>
+        </p:spPr>
+      </p:sp>
+      <p:sp>
+        <p:nvSpPr>
+          <p:cNvPr id="47" name="Text 45"/>
+          <p:cNvSpPr txBox="1"/>
+          <p:nvPr/>
+        </p:nvSpPr>
+        <p:spPr>
+          <a:xfrm>
+            <a:off x="6236208" y="1115568"/>
+            <a:ext cx="402336" cy="292608"/>
           </a:xfrm>
           <a:prstGeom prst="rect">
             <a:avLst/>
@@ -2489,7 +2850,177 @@
           <a:bodyPr wrap="square" lIns="0" tIns="0" rIns="0" bIns="0" rtlCol="0" anchor="ctr"/>
           <a:lstStyle/>
           <a:p>
-            <a:pPr indent="0" marL="0">
+            <a:pPr algn="ctr" indent="0" marL="0">
+              <a:buNone/>
+            </a:pPr>
+            <a:r>
+              <a:rPr lang="en-US" sz="1100" b="1" dirty="0">
+                <a:solidFill>
+                  <a:srgbClr val="FFFFFF"/>
+                </a:solidFill>
+                <a:latin typeface="Arial" pitchFamily="34" charset="0"/>
+                <a:ea typeface="Arial" pitchFamily="34" charset="-122"/>
+                <a:cs typeface="Arial" pitchFamily="34" charset="-120"/>
+              </a:rPr>
+              <a:t>4</a:t>
+            </a:r>
+            <a:endParaRPr lang="en-US" sz="1100" dirty="0"/>
+          </a:p>
+        </p:txBody>
+      </p:sp>
+      <p:sp>
+        <p:nvSpPr>
+          <p:cNvPr id="48" name="Text 46"/>
+          <p:cNvSpPr txBox="1"/>
+          <p:nvPr/>
+        </p:nvSpPr>
+        <p:spPr>
+          <a:xfrm>
+            <a:off x="6675120" y="1088136"/>
+            <a:ext cx="1719072" cy="566928"/>
+          </a:xfrm>
+          <a:prstGeom prst="rect">
+            <a:avLst/>
+          </a:prstGeom>
+          <a:noFill/>
+          <a:ln/>
+        </p:spPr>
+        <p:txBody>
+          <a:bodyPr wrap="square" lIns="0" tIns="0" rIns="0" bIns="0" rtlCol="0" anchor="t"/>
+          <a:lstStyle/>
+          <a:p>
+            <a:pPr indent="0" marL="0">
+              <a:lnSpc>
+                <a:spcPct val="105000"/>
+              </a:lnSpc>
+              <a:buNone/>
+            </a:pPr>
+            <a:r>
+              <a:rPr lang="en-US" sz="1150" b="1" dirty="0">
+                <a:solidFill>
+                  <a:srgbClr val="1B2A33"/>
+                </a:solidFill>
+                <a:latin typeface="Arial" pitchFamily="34" charset="0"/>
+                <a:ea typeface="Arial" pitchFamily="34" charset="-122"/>
+                <a:cs typeface="Arial" pitchFamily="34" charset="-120"/>
+              </a:rPr>
+              <a:t>Что не сделал</a:t>
+            </a:r>
+            <a:endParaRPr lang="en-US" sz="1150" dirty="0"/>
+          </a:p>
+          <a:p>
+            <a:pPr indent="0" marL="0">
+              <a:lnSpc>
+                <a:spcPct val="105000"/>
+              </a:lnSpc>
+              <a:buNone/>
+            </a:pPr>
+            <a:r>
+              <a:rPr lang="en-US" sz="1150" b="1" dirty="0">
+                <a:solidFill>
+                  <a:srgbClr val="1B2A33"/>
+                </a:solidFill>
+                <a:latin typeface="Arial" pitchFamily="34" charset="0"/>
+                <a:ea typeface="Arial" pitchFamily="34" charset="-122"/>
+                <a:cs typeface="Arial" pitchFamily="34" charset="-120"/>
+              </a:rPr>
+              <a:t>и узкое горлышко</a:t>
+            </a:r>
+            <a:endParaRPr lang="en-US" sz="1150" dirty="0"/>
+          </a:p>
+        </p:txBody>
+      </p:sp>
+      <p:sp>
+        <p:nvSpPr>
+          <p:cNvPr id="49" name="Shape 47"/>
+          <p:cNvSpPr/>
+          <p:nvPr/>
+        </p:nvSpPr>
+        <p:spPr>
+          <a:xfrm>
+            <a:off x="6291072" y="1755648"/>
+            <a:ext cx="2103120" cy="4041648"/>
+          </a:xfrm>
+          <a:prstGeom prst="roundRect">
+            <a:avLst>
+              <a:gd name="adj" fmla="val 2609"/>
+            </a:avLst>
+          </a:prstGeom>
+          <a:solidFill>
+            <a:srgbClr val="F4F7FE"/>
+          </a:solidFill>
+          <a:ln w="9525">
+            <a:solidFill>
+              <a:srgbClr val="D6E2FB"/>
+            </a:solidFill>
+            <a:prstDash val="solid"/>
+          </a:ln>
+        </p:spPr>
+      </p:sp>
+      <p:sp>
+        <p:nvSpPr>
+          <p:cNvPr id="50" name="Text 48"/>
+          <p:cNvSpPr txBox="1"/>
+          <p:nvPr/>
+        </p:nvSpPr>
+        <p:spPr>
+          <a:xfrm>
+            <a:off x="6419088" y="1883664"/>
+            <a:ext cx="1847088" cy="201168"/>
+          </a:xfrm>
+          <a:prstGeom prst="rect">
+            <a:avLst/>
+          </a:prstGeom>
+          <a:noFill/>
+          <a:ln/>
+        </p:spPr>
+        <p:txBody>
+          <a:bodyPr wrap="square" lIns="0" tIns="0" rIns="0" bIns="0" rtlCol="0" anchor="ctr"/>
+          <a:lstStyle/>
+          <a:p>
+            <a:pPr indent="0" marL="0">
+              <a:buNone/>
+            </a:pPr>
+            <a:r>
+              <a:rPr lang="en-US" sz="850" b="1" dirty="0">
+                <a:solidFill>
+                  <a:srgbClr val="F79009"/>
+                </a:solidFill>
+                <a:latin typeface="Arial" pitchFamily="34" charset="0"/>
+                <a:ea typeface="Arial" pitchFamily="34" charset="-122"/>
+                <a:cs typeface="Arial" pitchFamily="34" charset="-120"/>
+              </a:rPr>
+              <a:t>ключевая сложность</a:t>
+            </a:r>
+            <a:endParaRPr lang="en-US" sz="850" dirty="0"/>
+          </a:p>
+        </p:txBody>
+      </p:sp>
+      <p:sp>
+        <p:nvSpPr>
+          <p:cNvPr id="51" name="Text 49"/>
+          <p:cNvSpPr txBox="1"/>
+          <p:nvPr/>
+        </p:nvSpPr>
+        <p:spPr>
+          <a:xfrm>
+            <a:off x="6419088" y="2157984"/>
+            <a:ext cx="1847088" cy="384048"/>
+          </a:xfrm>
+          <a:prstGeom prst="rect">
+            <a:avLst/>
+          </a:prstGeom>
+          <a:noFill/>
+          <a:ln/>
+        </p:spPr>
+        <p:txBody>
+          <a:bodyPr wrap="square" lIns="0" tIns="0" rIns="0" bIns="0" rtlCol="0" anchor="t"/>
+          <a:lstStyle/>
+          <a:p>
+            <a:pPr indent="0" marL="0">
+              <a:lnSpc>
+                <a:spcPct val="105000"/>
+              </a:lnSpc>
               <a:buNone/>
             </a:pPr>
             <a:r>
@@ -2501,7 +3032,7 @@
                 <a:ea typeface="Arial" pitchFamily="34" charset="-122"/>
                 <a:cs typeface="Arial" pitchFamily="34" charset="-120"/>
               </a:rPr>
-              <a:t>Задача</a:t>
+              <a:t>Задача — почему не сделана</a:t>
             </a:r>
             <a:endParaRPr lang="en-US" sz="1050" dirty="0"/>
           </a:p>
@@ -2509,26 +3040,29 @@
       </p:sp>
       <p:sp>
         <p:nvSpPr>
-          <p:cNvPr id="39" name="Text 37"/>
-          <p:cNvSpPr txBox="1"/>
-          <p:nvPr/>
-        </p:nvSpPr>
-        <p:spPr>
-          <a:xfrm>
-            <a:off x="4297680" y="2350008"/>
-            <a:ext cx="1892808" cy="201168"/>
-          </a:xfrm>
-          <a:prstGeom prst="rect">
-            <a:avLst/>
-          </a:prstGeom>
-          <a:noFill/>
-          <a:ln/>
-        </p:spPr>
-        <p:txBody>
-          <a:bodyPr wrap="square" lIns="0" tIns="0" rIns="0" bIns="0" rtlCol="0" anchor="ctr"/>
-          <a:lstStyle/>
-          <a:p>
-            <a:pPr indent="0" marL="0">
+          <p:cNvPr id="52" name="Text 50"/>
+          <p:cNvSpPr txBox="1"/>
+          <p:nvPr/>
+        </p:nvSpPr>
+        <p:spPr>
+          <a:xfrm>
+            <a:off x="6419088" y="2560320"/>
+            <a:ext cx="1847088" cy="384048"/>
+          </a:xfrm>
+          <a:prstGeom prst="rect">
+            <a:avLst/>
+          </a:prstGeom>
+          <a:noFill/>
+          <a:ln/>
+        </p:spPr>
+        <p:txBody>
+          <a:bodyPr wrap="square" lIns="0" tIns="0" rIns="0" bIns="0" rtlCol="0" anchor="t"/>
+          <a:lstStyle/>
+          <a:p>
+            <a:pPr indent="0" marL="0">
+              <a:lnSpc>
+                <a:spcPct val="105000"/>
+              </a:lnSpc>
               <a:buNone/>
             </a:pPr>
             <a:r>
@@ -2540,7 +3074,7 @@
                 <a:ea typeface="Arial" pitchFamily="34" charset="-122"/>
                 <a:cs typeface="Arial" pitchFamily="34" charset="-120"/>
               </a:rPr>
-              <a:t>описание / результат</a:t>
+              <a:t>узкое горлышко: что мешает</a:t>
             </a:r>
             <a:endParaRPr lang="en-US" sz="900" dirty="0"/>
           </a:p>
@@ -2548,26 +3082,29 @@
       </p:sp>
       <p:sp>
         <p:nvSpPr>
-          <p:cNvPr id="40" name="Text 38"/>
-          <p:cNvSpPr txBox="1"/>
-          <p:nvPr/>
-        </p:nvSpPr>
-        <p:spPr>
-          <a:xfrm>
-            <a:off x="4297680" y="2852928"/>
-            <a:ext cx="1892808" cy="201168"/>
-          </a:xfrm>
-          <a:prstGeom prst="rect">
-            <a:avLst/>
-          </a:prstGeom>
-          <a:noFill/>
-          <a:ln/>
-        </p:spPr>
-        <p:txBody>
-          <a:bodyPr wrap="square" lIns="0" tIns="0" rIns="0" bIns="0" rtlCol="0" anchor="ctr"/>
-          <a:lstStyle/>
-          <a:p>
-            <a:pPr indent="0" marL="0">
+          <p:cNvPr id="53" name="Text 51"/>
+          <p:cNvSpPr txBox="1"/>
+          <p:nvPr/>
+        </p:nvSpPr>
+        <p:spPr>
+          <a:xfrm>
+            <a:off x="6419088" y="3328416"/>
+            <a:ext cx="1847088" cy="384048"/>
+          </a:xfrm>
+          <a:prstGeom prst="rect">
+            <a:avLst/>
+          </a:prstGeom>
+          <a:noFill/>
+          <a:ln/>
+        </p:spPr>
+        <p:txBody>
+          <a:bodyPr wrap="square" lIns="0" tIns="0" rIns="0" bIns="0" rtlCol="0" anchor="t"/>
+          <a:lstStyle/>
+          <a:p>
+            <a:pPr indent="0" marL="0">
+              <a:lnSpc>
+                <a:spcPct val="105000"/>
+              </a:lnSpc>
               <a:buNone/>
             </a:pPr>
             <a:r>
@@ -2579,7 +3116,7 @@
                 <a:ea typeface="Arial" pitchFamily="34" charset="-122"/>
                 <a:cs typeface="Arial" pitchFamily="34" charset="-120"/>
               </a:rPr>
-              <a:t>Задача</a:t>
+              <a:t>Задача — почему не сделана</a:t>
             </a:r>
             <a:endParaRPr lang="en-US" sz="1050" dirty="0"/>
           </a:p>
@@ -2587,26 +3124,29 @@
       </p:sp>
       <p:sp>
         <p:nvSpPr>
-          <p:cNvPr id="41" name="Text 39"/>
-          <p:cNvSpPr txBox="1"/>
-          <p:nvPr/>
-        </p:nvSpPr>
-        <p:spPr>
-          <a:xfrm>
-            <a:off x="4297680" y="3044952"/>
-            <a:ext cx="1892808" cy="201168"/>
-          </a:xfrm>
-          <a:prstGeom prst="rect">
-            <a:avLst/>
-          </a:prstGeom>
-          <a:noFill/>
-          <a:ln/>
-        </p:spPr>
-        <p:txBody>
-          <a:bodyPr wrap="square" lIns="0" tIns="0" rIns="0" bIns="0" rtlCol="0" anchor="ctr"/>
-          <a:lstStyle/>
-          <a:p>
-            <a:pPr indent="0" marL="0">
+          <p:cNvPr id="54" name="Text 52"/>
+          <p:cNvSpPr txBox="1"/>
+          <p:nvPr/>
+        </p:nvSpPr>
+        <p:spPr>
+          <a:xfrm>
+            <a:off x="6419088" y="3730752"/>
+            <a:ext cx="1847088" cy="384048"/>
+          </a:xfrm>
+          <a:prstGeom prst="rect">
+            <a:avLst/>
+          </a:prstGeom>
+          <a:noFill/>
+          <a:ln/>
+        </p:spPr>
+        <p:txBody>
+          <a:bodyPr wrap="square" lIns="0" tIns="0" rIns="0" bIns="0" rtlCol="0" anchor="t"/>
+          <a:lstStyle/>
+          <a:p>
+            <a:pPr indent="0" marL="0">
+              <a:lnSpc>
+                <a:spcPct val="105000"/>
+              </a:lnSpc>
               <a:buNone/>
             </a:pPr>
             <a:r>
@@ -2618,7 +3158,7 @@
                 <a:ea typeface="Arial" pitchFamily="34" charset="-122"/>
                 <a:cs typeface="Arial" pitchFamily="34" charset="-120"/>
               </a:rPr>
-              <a:t>описание / результат</a:t>
+              <a:t>узкое горлышко: что мешает</a:t>
             </a:r>
             <a:endParaRPr lang="en-US" sz="900" dirty="0"/>
           </a:p>
@@ -2626,26 +3166,29 @@
       </p:sp>
       <p:sp>
         <p:nvSpPr>
-          <p:cNvPr id="42" name="Text 40"/>
-          <p:cNvSpPr txBox="1"/>
-          <p:nvPr/>
-        </p:nvSpPr>
-        <p:spPr>
-          <a:xfrm>
-            <a:off x="4297680" y="3547872"/>
-            <a:ext cx="1892808" cy="201168"/>
-          </a:xfrm>
-          <a:prstGeom prst="rect">
-            <a:avLst/>
-          </a:prstGeom>
-          <a:noFill/>
-          <a:ln/>
-        </p:spPr>
-        <p:txBody>
-          <a:bodyPr wrap="square" lIns="0" tIns="0" rIns="0" bIns="0" rtlCol="0" anchor="ctr"/>
-          <a:lstStyle/>
-          <a:p>
-            <a:pPr indent="0" marL="0">
+          <p:cNvPr id="55" name="Text 53"/>
+          <p:cNvSpPr txBox="1"/>
+          <p:nvPr/>
+        </p:nvSpPr>
+        <p:spPr>
+          <a:xfrm>
+            <a:off x="6419088" y="4498848"/>
+            <a:ext cx="1847088" cy="384048"/>
+          </a:xfrm>
+          <a:prstGeom prst="rect">
+            <a:avLst/>
+          </a:prstGeom>
+          <a:noFill/>
+          <a:ln/>
+        </p:spPr>
+        <p:txBody>
+          <a:bodyPr wrap="square" lIns="0" tIns="0" rIns="0" bIns="0" rtlCol="0" anchor="t"/>
+          <a:lstStyle/>
+          <a:p>
+            <a:pPr indent="0" marL="0">
+              <a:lnSpc>
+                <a:spcPct val="105000"/>
+              </a:lnSpc>
               <a:buNone/>
             </a:pPr>
             <a:r>
@@ -2657,7 +3200,7 @@
                 <a:ea typeface="Arial" pitchFamily="34" charset="-122"/>
                 <a:cs typeface="Arial" pitchFamily="34" charset="-120"/>
               </a:rPr>
-              <a:t>Задача</a:t>
+              <a:t>Задача — почему не сделана</a:t>
             </a:r>
             <a:endParaRPr lang="en-US" sz="1050" dirty="0"/>
           </a:p>
@@ -2665,26 +3208,29 @@
       </p:sp>
       <p:sp>
         <p:nvSpPr>
-          <p:cNvPr id="43" name="Text 41"/>
-          <p:cNvSpPr txBox="1"/>
-          <p:nvPr/>
-        </p:nvSpPr>
-        <p:spPr>
-          <a:xfrm>
-            <a:off x="4297680" y="3739896"/>
-            <a:ext cx="1892808" cy="201168"/>
-          </a:xfrm>
-          <a:prstGeom prst="rect">
-            <a:avLst/>
-          </a:prstGeom>
-          <a:noFill/>
-          <a:ln/>
-        </p:spPr>
-        <p:txBody>
-          <a:bodyPr wrap="square" lIns="0" tIns="0" rIns="0" bIns="0" rtlCol="0" anchor="ctr"/>
-          <a:lstStyle/>
-          <a:p>
-            <a:pPr indent="0" marL="0">
+          <p:cNvPr id="56" name="Text 54"/>
+          <p:cNvSpPr txBox="1"/>
+          <p:nvPr/>
+        </p:nvSpPr>
+        <p:spPr>
+          <a:xfrm>
+            <a:off x="6419088" y="4901184"/>
+            <a:ext cx="1847088" cy="384048"/>
+          </a:xfrm>
+          <a:prstGeom prst="rect">
+            <a:avLst/>
+          </a:prstGeom>
+          <a:noFill/>
+          <a:ln/>
+        </p:spPr>
+        <p:txBody>
+          <a:bodyPr wrap="square" lIns="0" tIns="0" rIns="0" bIns="0" rtlCol="0" anchor="t"/>
+          <a:lstStyle/>
+          <a:p>
+            <a:pPr indent="0" marL="0">
+              <a:lnSpc>
+                <a:spcPct val="105000"/>
+              </a:lnSpc>
               <a:buNone/>
             </a:pPr>
             <a:r>
@@ -2696,7 +3242,7 @@
                 <a:ea typeface="Arial" pitchFamily="34" charset="-122"/>
                 <a:cs typeface="Arial" pitchFamily="34" charset="-120"/>
               </a:rPr>
-              <a:t>описание / результат</a:t>
+              <a:t>узкое горлышко: что мешает</a:t>
             </a:r>
             <a:endParaRPr lang="en-US" sz="900" dirty="0"/>
           </a:p>
@@ -2704,169 +3250,13 @@
       </p:sp>
       <p:sp>
         <p:nvSpPr>
-          <p:cNvPr id="44" name="Text 42"/>
-          <p:cNvSpPr txBox="1"/>
-          <p:nvPr/>
-        </p:nvSpPr>
-        <p:spPr>
-          <a:xfrm>
-            <a:off x="4297680" y="4242816"/>
-            <a:ext cx="1892808" cy="201168"/>
-          </a:xfrm>
-          <a:prstGeom prst="rect">
-            <a:avLst/>
-          </a:prstGeom>
-          <a:noFill/>
-          <a:ln/>
-        </p:spPr>
-        <p:txBody>
-          <a:bodyPr wrap="square" lIns="0" tIns="0" rIns="0" bIns="0" rtlCol="0" anchor="ctr"/>
-          <a:lstStyle/>
-          <a:p>
-            <a:pPr indent="0" marL="0">
-              <a:buNone/>
-            </a:pPr>
-            <a:r>
-              <a:rPr lang="en-US" sz="1050" b="1" dirty="0">
-                <a:solidFill>
-                  <a:srgbClr val="1B2A33"/>
-                </a:solidFill>
-                <a:latin typeface="Arial" pitchFamily="34" charset="0"/>
-                <a:ea typeface="Arial" pitchFamily="34" charset="-122"/>
-                <a:cs typeface="Arial" pitchFamily="34" charset="-120"/>
-              </a:rPr>
-              <a:t>Задача</a:t>
-            </a:r>
-            <a:endParaRPr lang="en-US" sz="1050" dirty="0"/>
-          </a:p>
-        </p:txBody>
-      </p:sp>
-      <p:sp>
-        <p:nvSpPr>
-          <p:cNvPr id="45" name="Text 43"/>
-          <p:cNvSpPr txBox="1"/>
-          <p:nvPr/>
-        </p:nvSpPr>
-        <p:spPr>
-          <a:xfrm>
-            <a:off x="4297680" y="4434840"/>
-            <a:ext cx="1892808" cy="201168"/>
-          </a:xfrm>
-          <a:prstGeom prst="rect">
-            <a:avLst/>
-          </a:prstGeom>
-          <a:noFill/>
-          <a:ln/>
-        </p:spPr>
-        <p:txBody>
-          <a:bodyPr wrap="square" lIns="0" tIns="0" rIns="0" bIns="0" rtlCol="0" anchor="ctr"/>
-          <a:lstStyle/>
-          <a:p>
-            <a:pPr indent="0" marL="0">
-              <a:buNone/>
-            </a:pPr>
-            <a:r>
-              <a:rPr lang="en-US" sz="900" dirty="0">
-                <a:solidFill>
-                  <a:srgbClr val="9AA6A5"/>
-                </a:solidFill>
-                <a:latin typeface="Arial" pitchFamily="34" charset="0"/>
-                <a:ea typeface="Arial" pitchFamily="34" charset="-122"/>
-                <a:cs typeface="Arial" pitchFamily="34" charset="-120"/>
-              </a:rPr>
-              <a:t>описание / результат</a:t>
-            </a:r>
-            <a:endParaRPr lang="en-US" sz="900" dirty="0"/>
-          </a:p>
-        </p:txBody>
-      </p:sp>
-      <p:sp>
-        <p:nvSpPr>
-          <p:cNvPr id="46" name="Text 44"/>
-          <p:cNvSpPr txBox="1"/>
-          <p:nvPr/>
-        </p:nvSpPr>
-        <p:spPr>
-          <a:xfrm>
-            <a:off x="4297680" y="4937760"/>
-            <a:ext cx="1892808" cy="201168"/>
-          </a:xfrm>
-          <a:prstGeom prst="rect">
-            <a:avLst/>
-          </a:prstGeom>
-          <a:noFill/>
-          <a:ln/>
-        </p:spPr>
-        <p:txBody>
-          <a:bodyPr wrap="square" lIns="0" tIns="0" rIns="0" bIns="0" rtlCol="0" anchor="ctr"/>
-          <a:lstStyle/>
-          <a:p>
-            <a:pPr indent="0" marL="0">
-              <a:buNone/>
-            </a:pPr>
-            <a:r>
-              <a:rPr lang="en-US" sz="1050" b="1" dirty="0">
-                <a:solidFill>
-                  <a:srgbClr val="1B2A33"/>
-                </a:solidFill>
-                <a:latin typeface="Arial" pitchFamily="34" charset="0"/>
-                <a:ea typeface="Arial" pitchFamily="34" charset="-122"/>
-                <a:cs typeface="Arial" pitchFamily="34" charset="-120"/>
-              </a:rPr>
-              <a:t>Задача</a:t>
-            </a:r>
-            <a:endParaRPr lang="en-US" sz="1050" dirty="0"/>
-          </a:p>
-        </p:txBody>
-      </p:sp>
-      <p:sp>
-        <p:nvSpPr>
-          <p:cNvPr id="47" name="Text 45"/>
-          <p:cNvSpPr txBox="1"/>
-          <p:nvPr/>
-        </p:nvSpPr>
-        <p:spPr>
-          <a:xfrm>
-            <a:off x="4297680" y="5129784"/>
-            <a:ext cx="1892808" cy="201168"/>
-          </a:xfrm>
-          <a:prstGeom prst="rect">
-            <a:avLst/>
-          </a:prstGeom>
-          <a:noFill/>
-          <a:ln/>
-        </p:spPr>
-        <p:txBody>
-          <a:bodyPr wrap="square" lIns="0" tIns="0" rIns="0" bIns="0" rtlCol="0" anchor="ctr"/>
-          <a:lstStyle/>
-          <a:p>
-            <a:pPr indent="0" marL="0">
-              <a:buNone/>
-            </a:pPr>
-            <a:r>
-              <a:rPr lang="en-US" sz="900" dirty="0">
-                <a:solidFill>
-                  <a:srgbClr val="9AA6A5"/>
-                </a:solidFill>
-                <a:latin typeface="Arial" pitchFamily="34" charset="0"/>
-                <a:ea typeface="Arial" pitchFamily="34" charset="-122"/>
-                <a:cs typeface="Arial" pitchFamily="34" charset="-120"/>
-              </a:rPr>
-              <a:t>описание / результат</a:t>
-            </a:r>
-            <a:endParaRPr lang="en-US" sz="900" dirty="0"/>
-          </a:p>
-        </p:txBody>
-      </p:sp>
-      <p:sp>
-        <p:nvSpPr>
-          <p:cNvPr id="48" name="Shape 46"/>
+          <p:cNvPr id="57" name="Shape 55"/>
           <p:cNvSpPr/>
           <p:nvPr/>
         </p:nvSpPr>
         <p:spPr>
           <a:xfrm>
-            <a:off x="6428232" y="1115568"/>
+            <a:off x="8503920" y="1115568"/>
             <a:ext cx="292608" cy="292608"/>
           </a:xfrm>
           <a:prstGeom prst="ellipse">
@@ -2885,13 +3275,13 @@
       </p:sp>
       <p:sp>
         <p:nvSpPr>
-          <p:cNvPr id="49" name="Text 47"/>
-          <p:cNvSpPr txBox="1"/>
-          <p:nvPr/>
-        </p:nvSpPr>
-        <p:spPr>
-          <a:xfrm>
-            <a:off x="6373368" y="1115568"/>
+          <p:cNvPr id="58" name="Text 56"/>
+          <p:cNvSpPr txBox="1"/>
+          <p:nvPr/>
+        </p:nvSpPr>
+        <p:spPr>
+          <a:xfrm>
+            <a:off x="8449056" y="1115568"/>
             <a:ext cx="402336" cy="292608"/>
           </a:xfrm>
           <a:prstGeom prst="rect">
@@ -2916,7 +3306,7 @@
                 <a:ea typeface="Arial" pitchFamily="34" charset="-122"/>
                 <a:cs typeface="Arial" pitchFamily="34" charset="-120"/>
               </a:rPr>
-              <a:t>3</a:t>
+              <a:t>5</a:t>
             </a:r>
             <a:endParaRPr lang="en-US" sz="1100" dirty="0"/>
           </a:p>
@@ -2924,14 +3314,14 @@
       </p:sp>
       <p:sp>
         <p:nvSpPr>
-          <p:cNvPr id="50" name="Text 48"/>
-          <p:cNvSpPr txBox="1"/>
-          <p:nvPr/>
-        </p:nvSpPr>
-        <p:spPr>
-          <a:xfrm>
-            <a:off x="6812280" y="1088136"/>
-            <a:ext cx="1307592" cy="566928"/>
+          <p:cNvPr id="59" name="Text 57"/>
+          <p:cNvSpPr txBox="1"/>
+          <p:nvPr/>
+        </p:nvSpPr>
+        <p:spPr>
+          <a:xfrm>
+            <a:off x="8887968" y="1088136"/>
+            <a:ext cx="1261872" cy="566928"/>
           </a:xfrm>
           <a:prstGeom prst="rect">
             <a:avLst/>
@@ -2958,7 +3348,7 @@
                 <a:ea typeface="Arial" pitchFamily="34" charset="-122"/>
                 <a:cs typeface="Arial" pitchFamily="34" charset="-120"/>
               </a:rPr>
-              <a:t>Что ограничивает цель</a:t>
+              <a:t>Гипотезы и решения</a:t>
             </a:r>
             <a:endParaRPr lang="en-US" sz="1150" dirty="0"/>
           </a:p>
@@ -2966,18 +3356,18 @@
       </p:sp>
       <p:sp>
         <p:nvSpPr>
-          <p:cNvPr id="51" name="Shape 49"/>
+          <p:cNvPr id="60" name="Shape 58"/>
           <p:cNvSpPr/>
           <p:nvPr/>
         </p:nvSpPr>
         <p:spPr>
           <a:xfrm>
-            <a:off x="6428232" y="1755648"/>
-            <a:ext cx="1691640" cy="4041648"/>
+            <a:off x="8503920" y="1755648"/>
+            <a:ext cx="1645920" cy="4041648"/>
           </a:xfrm>
           <a:prstGeom prst="roundRect">
             <a:avLst>
-              <a:gd name="adj" fmla="val 3243"/>
+              <a:gd name="adj" fmla="val 3333"/>
             </a:avLst>
           </a:prstGeom>
           <a:solidFill>
@@ -2993,14 +3383,14 @@
       </p:sp>
       <p:sp>
         <p:nvSpPr>
-          <p:cNvPr id="52" name="Text 50"/>
-          <p:cNvSpPr txBox="1"/>
-          <p:nvPr/>
-        </p:nvSpPr>
-        <p:spPr>
-          <a:xfrm>
-            <a:off x="6556248" y="1883664"/>
-            <a:ext cx="1435608" cy="3785616"/>
+          <p:cNvPr id="61" name="Text 59"/>
+          <p:cNvSpPr txBox="1"/>
+          <p:nvPr/>
+        </p:nvSpPr>
+        <p:spPr>
+          <a:xfrm>
+            <a:off x="8631936" y="1883664"/>
+            <a:ext cx="1389888" cy="3785616"/>
           </a:xfrm>
           <a:prstGeom prst="rect">
             <a:avLst/>
@@ -3075,13 +3465,13 @@
       </p:sp>
       <p:sp>
         <p:nvSpPr>
-          <p:cNvPr id="53" name="Shape 51"/>
+          <p:cNvPr id="62" name="Shape 60"/>
           <p:cNvSpPr/>
           <p:nvPr/>
         </p:nvSpPr>
         <p:spPr>
           <a:xfrm>
-            <a:off x="8229600" y="1115568"/>
+            <a:off x="10259568" y="1115568"/>
             <a:ext cx="292608" cy="292608"/>
           </a:xfrm>
           <a:prstGeom prst="ellipse">
@@ -3100,13 +3490,13 @@
       </p:sp>
       <p:sp>
         <p:nvSpPr>
-          <p:cNvPr id="54" name="Text 52"/>
-          <p:cNvSpPr txBox="1"/>
-          <p:nvPr/>
-        </p:nvSpPr>
-        <p:spPr>
-          <a:xfrm>
-            <a:off x="8174736" y="1115568"/>
+          <p:cNvPr id="63" name="Text 61"/>
+          <p:cNvSpPr txBox="1"/>
+          <p:nvPr/>
+        </p:nvSpPr>
+        <p:spPr>
+          <a:xfrm>
+            <a:off x="10204704" y="1115568"/>
             <a:ext cx="402336" cy="292608"/>
           </a:xfrm>
           <a:prstGeom prst="rect">
@@ -3131,7 +3521,7 @@
                 <a:ea typeface="Arial" pitchFamily="34" charset="-122"/>
                 <a:cs typeface="Arial" pitchFamily="34" charset="-120"/>
               </a:rPr>
-              <a:t>4</a:t>
+              <a:t>6</a:t>
             </a:r>
             <a:endParaRPr lang="en-US" sz="1100" dirty="0"/>
           </a:p>
@@ -3139,14 +3529,14 @@
       </p:sp>
       <p:sp>
         <p:nvSpPr>
-          <p:cNvPr id="55" name="Text 53"/>
-          <p:cNvSpPr txBox="1"/>
-          <p:nvPr/>
-        </p:nvSpPr>
-        <p:spPr>
-          <a:xfrm>
-            <a:off x="8613648" y="1088136"/>
-            <a:ext cx="1399032" cy="566928"/>
+          <p:cNvPr id="64" name="Text 62"/>
+          <p:cNvSpPr txBox="1"/>
+          <p:nvPr/>
+        </p:nvSpPr>
+        <p:spPr>
+          <a:xfrm>
+            <a:off x="10643616" y="1088136"/>
+            <a:ext cx="1170432" cy="566928"/>
           </a:xfrm>
           <a:prstGeom prst="rect">
             <a:avLst/>
@@ -3173,7 +3563,7 @@
                 <a:ea typeface="Arial" pitchFamily="34" charset="-122"/>
                 <a:cs typeface="Arial" pitchFamily="34" charset="-120"/>
               </a:rPr>
-              <a:t>Гипотезы и решения</a:t>
+              <a:t>Приоритеты на 2 недели</a:t>
             </a:r>
             <a:endParaRPr lang="en-US" sz="1150" dirty="0"/>
           </a:p>
@@ -3181,18 +3571,18 @@
       </p:sp>
       <p:sp>
         <p:nvSpPr>
-          <p:cNvPr id="56" name="Shape 54"/>
+          <p:cNvPr id="65" name="Shape 63"/>
           <p:cNvSpPr/>
           <p:nvPr/>
         </p:nvSpPr>
         <p:spPr>
           <a:xfrm>
-            <a:off x="8229600" y="1755648"/>
-            <a:ext cx="1783080" cy="4041648"/>
+            <a:off x="10259568" y="1755648"/>
+            <a:ext cx="1554480" cy="4041648"/>
           </a:xfrm>
           <a:prstGeom prst="roundRect">
             <a:avLst>
-              <a:gd name="adj" fmla="val 3077"/>
+              <a:gd name="adj" fmla="val 3529"/>
             </a:avLst>
           </a:prstGeom>
           <a:solidFill>
@@ -3208,229 +3598,14 @@
       </p:sp>
       <p:sp>
         <p:nvSpPr>
-          <p:cNvPr id="57" name="Text 55"/>
-          <p:cNvSpPr txBox="1"/>
-          <p:nvPr/>
-        </p:nvSpPr>
-        <p:spPr>
-          <a:xfrm>
-            <a:off x="8357616" y="1883664"/>
-            <a:ext cx="1527048" cy="3785616"/>
-          </a:xfrm>
-          <a:prstGeom prst="rect">
-            <a:avLst/>
-          </a:prstGeom>
-          <a:noFill/>
-          <a:ln/>
-        </p:spPr>
-        <p:txBody>
-          <a:bodyPr wrap="square" lIns="0" tIns="0" rIns="0" bIns="0" rtlCol="0" anchor="t"/>
-          <a:lstStyle/>
-          <a:p>
-            <a:pPr indent="0" marL="0">
-              <a:spcAft>
-                <a:spcPts val="2600"/>
-              </a:spcAft>
-              <a:buNone/>
-            </a:pPr>
-            <a:r>
-              <a:rPr lang="en-US" sz="1050" dirty="0">
-                <a:solidFill>
-                  <a:srgbClr val="1B2A33"/>
-                </a:solidFill>
-                <a:latin typeface="Arial" pitchFamily="34" charset="0"/>
-                <a:ea typeface="Arial" pitchFamily="34" charset="-122"/>
-                <a:cs typeface="Arial" pitchFamily="34" charset="-120"/>
-              </a:rPr>
-              <a:t>—</a:t>
-            </a:r>
-            <a:endParaRPr lang="en-US" sz="1050" dirty="0"/>
-          </a:p>
-          <a:p>
-            <a:pPr indent="0" marL="0">
-              <a:spcAft>
-                <a:spcPts val="2600"/>
-              </a:spcAft>
-              <a:buNone/>
-            </a:pPr>
-            <a:r>
-              <a:rPr lang="en-US" sz="1050" dirty="0">
-                <a:solidFill>
-                  <a:srgbClr val="1B2A33"/>
-                </a:solidFill>
-                <a:latin typeface="Arial" pitchFamily="34" charset="0"/>
-                <a:ea typeface="Arial" pitchFamily="34" charset="-122"/>
-                <a:cs typeface="Arial" pitchFamily="34" charset="-120"/>
-              </a:rPr>
-              <a:t>—</a:t>
-            </a:r>
-            <a:endParaRPr lang="en-US" sz="1050" dirty="0"/>
-          </a:p>
-          <a:p>
-            <a:pPr indent="0" marL="0">
-              <a:spcAft>
-                <a:spcPts val="2600"/>
-              </a:spcAft>
-              <a:buNone/>
-            </a:pPr>
-            <a:r>
-              <a:rPr lang="en-US" sz="1050" dirty="0">
-                <a:solidFill>
-                  <a:srgbClr val="1B2A33"/>
-                </a:solidFill>
-                <a:latin typeface="Arial" pitchFamily="34" charset="0"/>
-                <a:ea typeface="Arial" pitchFamily="34" charset="-122"/>
-                <a:cs typeface="Arial" pitchFamily="34" charset="-120"/>
-              </a:rPr>
-              <a:t>—</a:t>
-            </a:r>
-            <a:endParaRPr lang="en-US" sz="1050" dirty="0"/>
-          </a:p>
-        </p:txBody>
-      </p:sp>
-      <p:sp>
-        <p:nvSpPr>
-          <p:cNvPr id="58" name="Shape 56"/>
-          <p:cNvSpPr/>
-          <p:nvPr/>
-        </p:nvSpPr>
-        <p:spPr>
-          <a:xfrm>
-            <a:off x="10122408" y="1115568"/>
-            <a:ext cx="292608" cy="292608"/>
-          </a:xfrm>
-          <a:prstGeom prst="ellipse">
-            <a:avLst/>
-          </a:prstGeom>
-          <a:solidFill>
-            <a:srgbClr val="EAF1FE"/>
-          </a:solidFill>
-          <a:ln w="12700">
-            <a:solidFill>
-              <a:srgbClr val="EAF1FE"/>
-            </a:solidFill>
-            <a:prstDash val="solid"/>
-          </a:ln>
-        </p:spPr>
-      </p:sp>
-      <p:sp>
-        <p:nvSpPr>
-          <p:cNvPr id="59" name="Text 57"/>
-          <p:cNvSpPr txBox="1"/>
-          <p:nvPr/>
-        </p:nvSpPr>
-        <p:spPr>
-          <a:xfrm>
-            <a:off x="10067544" y="1115568"/>
-            <a:ext cx="402336" cy="292608"/>
-          </a:xfrm>
-          <a:prstGeom prst="rect">
-            <a:avLst/>
-          </a:prstGeom>
-          <a:noFill/>
-          <a:ln/>
-        </p:spPr>
-        <p:txBody>
-          <a:bodyPr wrap="square" lIns="0" tIns="0" rIns="0" bIns="0" rtlCol="0" anchor="ctr"/>
-          <a:lstStyle/>
-          <a:p>
-            <a:pPr algn="ctr" indent="0" marL="0">
-              <a:buNone/>
-            </a:pPr>
-            <a:r>
-              <a:rPr lang="en-US" sz="1100" b="1" dirty="0">
-                <a:solidFill>
-                  <a:srgbClr val="3B6FE0"/>
-                </a:solidFill>
-                <a:latin typeface="Arial" pitchFamily="34" charset="0"/>
-                <a:ea typeface="Arial" pitchFamily="34" charset="-122"/>
-                <a:cs typeface="Arial" pitchFamily="34" charset="-120"/>
-              </a:rPr>
-              <a:t>5</a:t>
-            </a:r>
-            <a:endParaRPr lang="en-US" sz="1100" dirty="0"/>
-          </a:p>
-        </p:txBody>
-      </p:sp>
-      <p:sp>
-        <p:nvSpPr>
-          <p:cNvPr id="60" name="Text 58"/>
-          <p:cNvSpPr txBox="1"/>
-          <p:nvPr/>
-        </p:nvSpPr>
-        <p:spPr>
-          <a:xfrm>
-            <a:off x="10506456" y="1088136"/>
-            <a:ext cx="1307592" cy="566928"/>
-          </a:xfrm>
-          <a:prstGeom prst="rect">
-            <a:avLst/>
-          </a:prstGeom>
-          <a:noFill/>
-          <a:ln/>
-        </p:spPr>
-        <p:txBody>
-          <a:bodyPr wrap="square" lIns="0" tIns="0" rIns="0" bIns="0" rtlCol="0" anchor="t"/>
-          <a:lstStyle/>
-          <a:p>
-            <a:pPr indent="0" marL="0">
-              <a:lnSpc>
-                <a:spcPct val="105000"/>
-              </a:lnSpc>
-              <a:buNone/>
-            </a:pPr>
-            <a:r>
-              <a:rPr lang="en-US" sz="1150" b="1" dirty="0">
-                <a:solidFill>
-                  <a:srgbClr val="1B2A33"/>
-                </a:solidFill>
-                <a:latin typeface="Arial" pitchFamily="34" charset="0"/>
-                <a:ea typeface="Arial" pitchFamily="34" charset="-122"/>
-                <a:cs typeface="Arial" pitchFamily="34" charset="-120"/>
-              </a:rPr>
-              <a:t>Приоритеты на 2 недели</a:t>
-            </a:r>
-            <a:endParaRPr lang="en-US" sz="1150" dirty="0"/>
-          </a:p>
-        </p:txBody>
-      </p:sp>
-      <p:sp>
-        <p:nvSpPr>
-          <p:cNvPr id="61" name="Shape 59"/>
-          <p:cNvSpPr/>
-          <p:nvPr/>
-        </p:nvSpPr>
-        <p:spPr>
-          <a:xfrm>
-            <a:off x="10122408" y="1755648"/>
-            <a:ext cx="1691640" cy="4041648"/>
-          </a:xfrm>
-          <a:prstGeom prst="roundRect">
-            <a:avLst>
-              <a:gd name="adj" fmla="val 3243"/>
-            </a:avLst>
-          </a:prstGeom>
-          <a:solidFill>
-            <a:srgbClr val="F6F8F8"/>
-          </a:solidFill>
-          <a:ln w="9525">
-            <a:solidFill>
-              <a:srgbClr val="E4E9E9"/>
-            </a:solidFill>
-            <a:prstDash val="solid"/>
-          </a:ln>
-        </p:spPr>
-      </p:sp>
-      <p:sp>
-        <p:nvSpPr>
-          <p:cNvPr id="62" name="Text 60"/>
-          <p:cNvSpPr txBox="1"/>
-          <p:nvPr/>
-        </p:nvSpPr>
-        <p:spPr>
-          <a:xfrm>
-            <a:off x="10250424" y="1883664"/>
-            <a:ext cx="1435608" cy="3785616"/>
+          <p:cNvPr id="66" name="Text 64"/>
+          <p:cNvSpPr txBox="1"/>
+          <p:nvPr/>
+        </p:nvSpPr>
+        <p:spPr>
+          <a:xfrm>
+            <a:off x="10387584" y="1883664"/>
+            <a:ext cx="1298448" cy="3785616"/>
           </a:xfrm>
           <a:prstGeom prst="rect">
             <a:avLst/>
